--- a/scenarios/S08_wadiz_product_launch/deliverables/와디즈_펀딩페이지_덱.pptx
+++ b/scenarios/S08_wadiz_product_launch/deliverables/와디즈_펀딩페이지_덱.pptx
@@ -13,6 +13,7 @@
     <p:sldId id="261" r:id="rId12"/>
     <p:sldId id="262" r:id="rId13"/>
     <p:sldId id="263" r:id="rId14"/>
+    <p:sldId id="264" r:id="rId15"/>
   </p:sldIdLst>
   <p:sldSz cx="9144000" cy="6858000" type="screen4x3"/>
   <p:notesSz cx="6858000" cy="9144000"/>
@@ -3557,7 +3558,7 @@
           <a:lstStyle/>
           <a:p>
             <a:r>
-              <a:t>문제제기→솔루션→핵심기능</a:t>
+              <a:t>문제 제기→제품 소개→핵심 기능 및 사용 시나리오→차별점→리워드 안내→제작·배송 일정→유의사항</a:t>
             </a:r>
           </a:p>
           <a:p>
@@ -3638,6 +3639,90 @@
           <a:p>
             <a:r>
               <a:t>배송 목표 6주</a:t>
+            </a:r>
+          </a:p>
+        </p:txBody>
+      </p:sp>
+    </p:spTree>
+  </p:cSld>
+  <p:clrMapOvr>
+    <a:masterClrMapping/>
+  </p:clrMapOvr>
+</p:sld>
+</file>
+
+<file path=ppt/slides/slide9.xml><?xml version="1.0" encoding="utf-8"?>
+<p:sld xmlns:a="http://schemas.openxmlformats.org/drawingml/2006/main" xmlns:p="http://schemas.openxmlformats.org/presentationml/2006/main" xmlns:r="http://schemas.openxmlformats.org/officeDocument/2006/relationships">
+  <p:cSld>
+    <p:spTree>
+      <p:nvGrpSpPr>
+        <p:cNvPr id="1" name=""/>
+        <p:cNvGrpSpPr/>
+        <p:nvPr/>
+      </p:nvGrpSpPr>
+      <p:grpSpPr/>
+      <p:sp>
+        <p:nvSpPr>
+          <p:cNvPr id="2" name="Title 1"/>
+          <p:cNvSpPr>
+            <a:spLocks noGrp="1"/>
+          </p:cNvSpPr>
+          <p:nvPr>
+            <p:ph type="title"/>
+          </p:nvPr>
+        </p:nvSpPr>
+        <p:spPr/>
+        <p:txBody>
+          <a:bodyPr/>
+          <a:lstStyle/>
+          <a:p>
+            <a:r>
+              <a:t>변경 이력: 와디즈 리워드·얼리버드·스토리 페이지</a:t>
+            </a:r>
+          </a:p>
+        </p:txBody>
+      </p:sp>
+      <p:sp>
+        <p:nvSpPr>
+          <p:cNvPr id="3" name="Content Placeholder 2"/>
+          <p:cNvSpPr>
+            <a:spLocks noGrp="1"/>
+          </p:cNvSpPr>
+          <p:nvPr>
+            <p:ph idx="1"/>
+          </p:nvPr>
+        </p:nvSpPr>
+        <p:spPr/>
+        <p:txBody>
+          <a:bodyPr/>
+          <a:lstStyle/>
+          <a:p>
+            <a:r>
+              <a:t>리워드 구성, 얼리버드 물량·전환 기준·재고 관리, 스토리 페이지 콘텐츠 구조 확정 방향 승인</a:t>
+            </a:r>
+          </a:p>
+          <a:p>
+            <a:pPr>
+              <a:defRPr sz="1400"/>
+            </a:pPr>
+            <a:r>
+              <a:t>스토리 페이지 순서: 문제 제기→제품 소개→핵심 기능 및 사용 시나리오→차별점→리워드 안내→제작·배송 일정→유의사항</a:t>
+            </a:r>
+          </a:p>
+          <a:p>
+            <a:pPr>
+              <a:defRPr sz="1400"/>
+            </a:pPr>
+            <a:r>
+              <a:t>원가·마진·생산능력·배송·AI 기능·개인정보 처리 및 규제 검토를 후속 검증 조건으로 설정</a:t>
+            </a:r>
+          </a:p>
+          <a:p>
+            <a:pPr>
+              <a:defRPr sz="1400"/>
+            </a:pPr>
+            <a:r>
+              <a:t>REQ-20250308-wadiz-journal-rewards-earlybird-story / DA 5</a:t>
             </a:r>
           </a:p>
         </p:txBody>

--- a/scenarios/S08_wadiz_product_launch/deliverables/와디즈_펀딩페이지_덱.pptx
+++ b/scenarios/S08_wadiz_product_launch/deliverables/와디즈_펀딩페이지_덱.pptx
@@ -14,6 +14,7 @@
     <p:sldId id="262" r:id="rId13"/>
     <p:sldId id="263" r:id="rId14"/>
     <p:sldId id="264" r:id="rId15"/>
+    <p:sldId id="265" r:id="rId16"/>
   </p:sldIdLst>
   <p:sldSz cx="9144000" cy="6858000" type="screen4x3"/>
   <p:notesSz cx="6858000" cy="9144000"/>
@@ -3134,6 +3135,98 @@
           <a:p>
             <a:r>
               <a:t>와디즈 크라우드펀딩 런칭</a:t>
+            </a:r>
+          </a:p>
+        </p:txBody>
+      </p:sp>
+    </p:spTree>
+  </p:cSld>
+  <p:clrMapOvr>
+    <a:masterClrMapping/>
+  </p:clrMapOvr>
+</p:sld>
+</file>
+
+<file path=ppt/slides/slide10.xml><?xml version="1.0" encoding="utf-8"?>
+<p:sld xmlns:a="http://schemas.openxmlformats.org/drawingml/2006/main" xmlns:p="http://schemas.openxmlformats.org/presentationml/2006/main" xmlns:r="http://schemas.openxmlformats.org/officeDocument/2006/relationships">
+  <p:cSld>
+    <p:spTree>
+      <p:nvGrpSpPr>
+        <p:cNvPr id="1" name=""/>
+        <p:cNvGrpSpPr/>
+        <p:nvPr/>
+      </p:nvGrpSpPr>
+      <p:grpSpPr/>
+      <p:sp>
+        <p:nvSpPr>
+          <p:cNvPr id="2" name="Title 1"/>
+          <p:cNvSpPr>
+            <a:spLocks noGrp="1"/>
+          </p:cNvSpPr>
+          <p:nvPr>
+            <p:ph type="title"/>
+          </p:nvPr>
+        </p:nvSpPr>
+        <p:spPr/>
+        <p:txBody>
+          <a:bodyPr/>
+          <a:lstStyle/>
+          <a:p>
+            <a:r>
+              <a:t>변경 이력: 와디즈 승인 산출물 게이트</a:t>
+            </a:r>
+          </a:p>
+        </p:txBody>
+      </p:sp>
+      <p:sp>
+        <p:nvSpPr>
+          <p:cNvPr id="3" name="Content Placeholder 2"/>
+          <p:cNvSpPr>
+            <a:spLocks noGrp="1"/>
+          </p:cNvSpPr>
+          <p:nvPr>
+            <p:ph idx="1"/>
+          </p:nvPr>
+        </p:nvSpPr>
+        <p:spPr/>
+        <p:txBody>
+          <a:bodyPr/>
+          <a:lstStyle/>
+          <a:p>
+            <a:r>
+              <a:t>리워드·얼리버드·스토리 페이지 및 관련 문서 산출물 업데이트 승인</a:t>
+            </a:r>
+          </a:p>
+          <a:p>
+            <a:pPr>
+              <a:defRPr sz="1400"/>
+            </a:pPr>
+            <a:r>
+              <a:t>리워드 구성, 단계별 얼리버드 수량·판매 조건·재고 관리, 스토리 페이지 7단계 구조 반영</a:t>
+            </a:r>
+          </a:p>
+          <a:p>
+            <a:pPr>
+              <a:defRPr sz="1400"/>
+            </a:pPr>
+            <a:r>
+              <a:t>가격·수량·일정·대외 공개 문구는 원가·마진·생산·배송·AI 기능·개인정보·규제 검증 완료 후 확정</a:t>
+            </a:r>
+          </a:p>
+          <a:p>
+            <a:pPr>
+              <a:defRPr sz="1400"/>
+            </a:pPr>
+            <a:r>
+              <a:t>담당자·증빙·승인 게이트 확인을 RTM에 연결</a:t>
+            </a:r>
+          </a:p>
+          <a:p>
+            <a:pPr>
+              <a:defRPr sz="1400"/>
+            </a:pPr>
+            <a:r>
+              <a:t>REQ-20250308-wadiz-approval-deliverable-gates / DA 5</a:t>
             </a:r>
           </a:p>
         </p:txBody>

--- a/scenarios/S08_wadiz_product_launch/deliverables/와디즈_펀딩페이지_덱.pptx
+++ b/scenarios/S08_wadiz_product_launch/deliverables/와디즈_펀딩페이지_덱.pptx
@@ -15,6 +15,7 @@
     <p:sldId id="263" r:id="rId14"/>
     <p:sldId id="264" r:id="rId15"/>
     <p:sldId id="265" r:id="rId16"/>
+    <p:sldId id="266" r:id="rId17"/>
   </p:sldIdLst>
   <p:sldSz cx="9144000" cy="6858000" type="screen4x3"/>
   <p:notesSz cx="6858000" cy="9144000"/>
@@ -3239,6 +3240,98 @@
 </p:sld>
 </file>
 
+<file path=ppt/slides/slide11.xml><?xml version="1.0" encoding="utf-8"?>
+<p:sld xmlns:a="http://schemas.openxmlformats.org/drawingml/2006/main" xmlns:p="http://schemas.openxmlformats.org/presentationml/2006/main" xmlns:r="http://schemas.openxmlformats.org/officeDocument/2006/relationships">
+  <p:cSld>
+    <p:spTree>
+      <p:nvGrpSpPr>
+        <p:cNvPr id="1" name=""/>
+        <p:cNvGrpSpPr/>
+        <p:nvPr/>
+      </p:nvGrpSpPr>
+      <p:grpSpPr/>
+      <p:sp>
+        <p:nvSpPr>
+          <p:cNvPr id="2" name="Title 1"/>
+          <p:cNvSpPr>
+            <a:spLocks noGrp="1"/>
+          </p:cNvSpPr>
+          <p:nvPr>
+            <p:ph type="title"/>
+          </p:nvPr>
+        </p:nvSpPr>
+        <p:spPr/>
+        <p:txBody>
+          <a:bodyPr/>
+          <a:lstStyle/>
+          <a:p>
+            <a:r>
+              <a:t>변경 이력: 와디즈 런칭 승인 요건</a:t>
+            </a:r>
+          </a:p>
+        </p:txBody>
+      </p:sp>
+      <p:sp>
+        <p:nvSpPr>
+          <p:cNvPr id="3" name="Content Placeholder 2"/>
+          <p:cNvSpPr>
+            <a:spLocks noGrp="1"/>
+          </p:cNvSpPr>
+          <p:nvPr>
+            <p:ph idx="1"/>
+          </p:nvPr>
+        </p:nvSpPr>
+        <p:spPr/>
+        <p:txBody>
+          <a:bodyPr/>
+          <a:lstStyle/>
+          <a:p>
+            <a:r>
+              <a:t>승인(bench auto)을 런칭 요건 반영 승인 상태로 기록</a:t>
+            </a:r>
+          </a:p>
+          <a:p>
+            <a:pPr>
+              <a:defRPr sz="1400"/>
+            </a:pPr>
+            <a:r>
+              <a:t>오픈예정 알림신청 2주·본 펀딩 4주·시제품 검수 완료 목표는 본 펀딩 오픈 10일 전으로 반영</a:t>
+            </a:r>
+          </a:p>
+          <a:p>
+            <a:pPr>
+              <a:defRPr sz="1400"/>
+            </a:pPr>
+            <a:r>
+              <a:t>리워드 구성·얼리버드 물량·스토리 페이지 구조는 담당 의사결정권자와 확정 기한 확인 전까지 미확정</a:t>
+            </a:r>
+          </a:p>
+          <a:p>
+            <a:pPr>
+              <a:defRPr sz="1400"/>
+            </a:pPr>
+            <a:r>
+              <a:t>DA 5점 조건부 승인: 의사결정권자·기한·의존성·컴플라이언스 게이트·검수 합격 기준·실패 대응 확정 필요</a:t>
+            </a:r>
+          </a:p>
+          <a:p>
+            <a:pPr>
+              <a:defRPr sz="1400"/>
+            </a:pPr>
+            <a:r>
+              <a:t>REQ-20250308-wadiz-launch-approval-gates / 위키 커밋 5bc1f0b905b71799ed19bb7075ff63a48c8f8c4e</a:t>
+            </a:r>
+          </a:p>
+        </p:txBody>
+      </p:sp>
+    </p:spTree>
+  </p:cSld>
+  <p:clrMapOvr>
+    <a:masterClrMapping/>
+  </p:clrMapOvr>
+</p:sld>
+</file>
+
 <file path=ppt/slides/slide2.xml><?xml version="1.0" encoding="utf-8"?>
 <p:sld xmlns:a="http://schemas.openxmlformats.org/drawingml/2006/main" xmlns:p="http://schemas.openxmlformats.org/presentationml/2006/main" xmlns:r="http://schemas.openxmlformats.org/officeDocument/2006/relationships">
   <p:cSld>
@@ -3721,7 +3814,7 @@
           <a:lstStyle/>
           <a:p>
             <a:r>
-              <a:t>펀딩 30일, 1주차 40% 목표</a:t>
+              <a:t>오픈예정 알림신청 2주, 본 펀딩 4주, 시제품 검수 완료 목표는 본 펀딩 오픈 10일 전</a:t>
             </a:r>
           </a:p>
           <a:p>

--- a/scenarios/S08_wadiz_product_launch/deliverables/와디즈_펀딩페이지_덱.pptx
+++ b/scenarios/S08_wadiz_product_launch/deliverables/와디즈_펀딩페이지_덱.pptx
@@ -16,6 +16,7 @@
     <p:sldId id="264" r:id="rId15"/>
     <p:sldId id="265" r:id="rId16"/>
     <p:sldId id="266" r:id="rId17"/>
+    <p:sldId id="267" r:id="rId18"/>
   </p:sldIdLst>
   <p:sldSz cx="9144000" cy="6858000" type="screen4x3"/>
   <p:notesSz cx="6858000" cy="9144000"/>
@@ -3320,6 +3321,98 @@
             </a:pPr>
             <a:r>
               <a:t>REQ-20250308-wadiz-launch-approval-gates / 위키 커밋 5bc1f0b905b71799ed19bb7075ff63a48c8f8c4e</a:t>
+            </a:r>
+          </a:p>
+        </p:txBody>
+      </p:sp>
+    </p:spTree>
+  </p:cSld>
+  <p:clrMapOvr>
+    <a:masterClrMapping/>
+  </p:clrMapOvr>
+</p:sld>
+</file>
+
+<file path=ppt/slides/slide12.xml><?xml version="1.0" encoding="utf-8"?>
+<p:sld xmlns:a="http://schemas.openxmlformats.org/drawingml/2006/main" xmlns:p="http://schemas.openxmlformats.org/presentationml/2006/main" xmlns:r="http://schemas.openxmlformats.org/officeDocument/2006/relationships">
+  <p:cSld>
+    <p:spTree>
+      <p:nvGrpSpPr>
+        <p:cNvPr id="1" name=""/>
+        <p:cNvGrpSpPr/>
+        <p:nvPr/>
+      </p:nvGrpSpPr>
+      <p:grpSpPr/>
+      <p:sp>
+        <p:nvSpPr>
+          <p:cNvPr id="2" name="Title 1"/>
+          <p:cNvSpPr>
+            <a:spLocks noGrp="1"/>
+          </p:cNvSpPr>
+          <p:nvPr>
+            <p:ph type="title"/>
+          </p:nvPr>
+        </p:nvSpPr>
+        <p:spPr/>
+        <p:txBody>
+          <a:bodyPr/>
+          <a:lstStyle/>
+          <a:p>
+            <a:r>
+              <a:t>변경 이력: 와디즈 런칭 승인 실행</a:t>
+            </a:r>
+          </a:p>
+        </p:txBody>
+      </p:sp>
+      <p:sp>
+        <p:nvSpPr>
+          <p:cNvPr id="3" name="Content Placeholder 2"/>
+          <p:cNvSpPr>
+            <a:spLocks noGrp="1"/>
+          </p:cNvSpPr>
+          <p:nvPr>
+            <p:ph idx="1"/>
+          </p:nvPr>
+        </p:nvSpPr>
+        <p:spPr/>
+        <p:txBody>
+          <a:bodyPr/>
+          <a:lstStyle/>
+          <a:p>
+            <a:r>
+              <a:t>와디즈 런칭 방향과 영향 산출물 갱신 범위를 승인 및 기록</a:t>
+            </a:r>
+          </a:p>
+          <a:p>
+            <a:pPr>
+              <a:defRPr sz="1400"/>
+            </a:pPr>
+            <a:r>
+              <a:t>리워드 구성·얼리버드 물량·스토리 페이지 구조와 원가·생산·개인정보·규제 검증 조건을 연결</a:t>
+            </a:r>
+          </a:p>
+          <a:p>
+            <a:pPr>
+              <a:defRPr sz="1400"/>
+            </a:pPr>
+            <a:r>
+              <a:t>오픈예정 알림신청 2주, 본 펀딩 4주, 시제품 검수 완료 목표는 본 펀딩 오픈 10일 전</a:t>
+            </a:r>
+          </a:p>
+          <a:p>
+            <a:pPr>
+              <a:defRPr sz="1400"/>
+            </a:pPr>
+            <a:r>
+              <a:t>리워드 가격·수량·얼리버드 총량·스토리 문구·최종 일정은 담당자·증빙·승인 게이트 확인 후 확정</a:t>
+            </a:r>
+          </a:p>
+          <a:p>
+            <a:pPr>
+              <a:defRPr sz="1400"/>
+            </a:pPr>
+            <a:r>
+              <a:t>REQ-20250308-wadiz-approval-execution / DA 5</a:t>
             </a:r>
           </a:p>
         </p:txBody>

--- a/scenarios/S08_wadiz_product_launch/deliverables/와디즈_펀딩페이지_덱.pptx
+++ b/scenarios/S08_wadiz_product_launch/deliverables/와디즈_펀딩페이지_덱.pptx
@@ -17,6 +17,7 @@
     <p:sldId id="265" r:id="rId16"/>
     <p:sldId id="266" r:id="rId17"/>
     <p:sldId id="267" r:id="rId18"/>
+    <p:sldId id="268" r:id="rId19"/>
   </p:sldIdLst>
   <p:sldSz cx="9144000" cy="6858000" type="screen4x3"/>
   <p:notesSz cx="6858000" cy="9144000"/>
@@ -3413,6 +3414,98 @@
             </a:pPr>
             <a:r>
               <a:t>REQ-20250308-wadiz-approval-execution / DA 5</a:t>
+            </a:r>
+          </a:p>
+        </p:txBody>
+      </p:sp>
+    </p:spTree>
+  </p:cSld>
+  <p:clrMapOvr>
+    <a:masterClrMapping/>
+  </p:clrMapOvr>
+</p:sld>
+</file>
+
+<file path=ppt/slides/slide13.xml><?xml version="1.0" encoding="utf-8"?>
+<p:sld xmlns:a="http://schemas.openxmlformats.org/drawingml/2006/main" xmlns:p="http://schemas.openxmlformats.org/presentationml/2006/main" xmlns:r="http://schemas.openxmlformats.org/officeDocument/2006/relationships">
+  <p:cSld>
+    <p:spTree>
+      <p:nvGrpSpPr>
+        <p:cNvPr id="1" name=""/>
+        <p:cNvGrpSpPr/>
+        <p:nvPr/>
+      </p:nvGrpSpPr>
+      <p:grpSpPr/>
+      <p:sp>
+        <p:nvSpPr>
+          <p:cNvPr id="2" name="Title 1"/>
+          <p:cNvSpPr>
+            <a:spLocks noGrp="1"/>
+          </p:cNvSpPr>
+          <p:nvPr>
+            <p:ph type="title"/>
+          </p:nvPr>
+        </p:nvSpPr>
+        <p:spPr/>
+        <p:txBody>
+          <a:bodyPr/>
+          <a:lstStyle/>
+          <a:p>
+            <a:r>
+              <a:t>변경 이력: 와디즈 승인 페이로드 반영</a:t>
+            </a:r>
+          </a:p>
+        </p:txBody>
+      </p:sp>
+      <p:sp>
+        <p:nvSpPr>
+          <p:cNvPr id="3" name="Content Placeholder 2"/>
+          <p:cNvSpPr>
+            <a:spLocks noGrp="1"/>
+          </p:cNvSpPr>
+          <p:nvPr>
+            <p:ph idx="1"/>
+          </p:nvPr>
+        </p:nvSpPr>
+        <p:spPr/>
+        <p:txBody>
+          <a:bodyPr/>
+          <a:lstStyle/>
+          <a:p>
+            <a:r>
+              <a:t>리워드 구성·얼리버드 운영·스토리 페이지 7단계 구조와 런칭 일정의 확정 필요 범위를 관련 산출물에 반영</a:t>
+            </a:r>
+          </a:p>
+          <a:p>
+            <a:pPr>
+              <a:defRPr sz="1400"/>
+            </a:pPr>
+            <a:r>
+              <a:t>리워드 가격·수량·얼리버드 총량·최종 스토리 문구·확정 일정은 재무·재고·개인정보·규제 검증 및 의사결정권자 승인 전까지 미확정</a:t>
+            </a:r>
+          </a:p>
+          <a:p>
+            <a:pPr>
+              <a:defRPr sz="1400"/>
+            </a:pPr>
+            <a:r>
+              <a:t>오픈예정 알림신청 2주, 본 펀딩 4주, 시제품 검수 완료 목표는 본 펀딩 오픈 10일 전</a:t>
+            </a:r>
+          </a:p>
+          <a:p>
+            <a:pPr>
+              <a:defRPr sz="1400"/>
+            </a:pPr>
+            <a:r>
+              <a:t>원가·수수료·배송비·세금·환불·고객지원 비용, 목표 마진, 안전재고·불량률·검수·반품 물량·생산 리드타임을 검증 조건으로 추적</a:t>
+            </a:r>
+          </a:p>
+          <a:p>
+            <a:pPr>
+              <a:defRPr sz="1400"/>
+            </a:pPr>
+            <a:r>
+              <a:t>REQ-20250308-wadiz-approved-deliverables / DA 5</a:t>
             </a:r>
           </a:p>
         </p:txBody>

--- a/scenarios/S08_wadiz_product_launch/deliverables/와디즈_펀딩페이지_덱.pptx
+++ b/scenarios/S08_wadiz_product_launch/deliverables/와디즈_펀딩페이지_덱.pptx
@@ -18,6 +18,7 @@
     <p:sldId id="266" r:id="rId17"/>
     <p:sldId id="267" r:id="rId18"/>
     <p:sldId id="268" r:id="rId19"/>
+    <p:sldId id="269" r:id="rId20"/>
   </p:sldIdLst>
   <p:sldSz cx="9144000" cy="6858000" type="screen4x3"/>
   <p:notesSz cx="6858000" cy="9144000"/>
@@ -3506,6 +3507,98 @@
             </a:pPr>
             <a:r>
               <a:t>REQ-20250308-wadiz-approved-deliverables / DA 5</a:t>
+            </a:r>
+          </a:p>
+        </p:txBody>
+      </p:sp>
+    </p:spTree>
+  </p:cSld>
+  <p:clrMapOvr>
+    <a:masterClrMapping/>
+  </p:clrMapOvr>
+</p:sld>
+</file>
+
+<file path=ppt/slides/slide14.xml><?xml version="1.0" encoding="utf-8"?>
+<p:sld xmlns:a="http://schemas.openxmlformats.org/drawingml/2006/main" xmlns:p="http://schemas.openxmlformats.org/presentationml/2006/main" xmlns:r="http://schemas.openxmlformats.org/officeDocument/2006/relationships">
+  <p:cSld>
+    <p:spTree>
+      <p:nvGrpSpPr>
+        <p:cNvPr id="1" name=""/>
+        <p:cNvGrpSpPr/>
+        <p:nvPr/>
+      </p:nvGrpSpPr>
+      <p:grpSpPr/>
+      <p:sp>
+        <p:nvSpPr>
+          <p:cNvPr id="2" name="Title 1"/>
+          <p:cNvSpPr>
+            <a:spLocks noGrp="1"/>
+          </p:cNvSpPr>
+          <p:nvPr>
+            <p:ph type="title"/>
+          </p:nvPr>
+        </p:nvSpPr>
+        <p:spPr/>
+        <p:txBody>
+          <a:bodyPr/>
+          <a:lstStyle/>
+          <a:p>
+            <a:r>
+              <a:t>변경 이력: 와디즈 승인 페이로드 실행 기록</a:t>
+            </a:r>
+          </a:p>
+        </p:txBody>
+      </p:sp>
+      <p:sp>
+        <p:nvSpPr>
+          <p:cNvPr id="3" name="Content Placeholder 2"/>
+          <p:cNvSpPr>
+            <a:spLocks noGrp="1"/>
+          </p:cNvSpPr>
+          <p:nvPr>
+            <p:ph idx="1"/>
+          </p:nvPr>
+        </p:nvSpPr>
+        <p:spPr/>
+        <p:txBody>
+          <a:bodyPr/>
+          <a:lstStyle/>
+          <a:p>
+            <a:r>
+              <a:t>7개 산출물의 구성·검증 기준과 문서엔진 갱신 완료를 승인 기록으로 남김</a:t>
+            </a:r>
+          </a:p>
+          <a:p>
+            <a:pPr>
+              <a:defRPr sz="1400"/>
+            </a:pPr>
+            <a:r>
+              <a:t>오픈예정 알림신청 2주, 본 펀딩 4주, 시제품 검수 완료 목표는 본 펀딩 오픈 10일 전</a:t>
+            </a:r>
+          </a:p>
+          <a:p>
+            <a:pPr>
+              <a:defRPr sz="1400"/>
+            </a:pPr>
+            <a:r>
+              <a:t>가격·수량·최종 문구·공개 사양·일정은 책임자 승인 및 재무·재고·개인정보·규제·시제품 검증 전까지 미확정</a:t>
+            </a:r>
+          </a:p>
+          <a:p>
+            <a:pPr>
+              <a:defRPr sz="1400"/>
+            </a:pPr>
+            <a:r>
+              <a:t>미확정 의사결정, 담당자·증빙·승인 상태와 관련 리스크를 추적</a:t>
+            </a:r>
+          </a:p>
+          <a:p>
+            <a:pPr>
+              <a:defRPr sz="1400"/>
+            </a:pPr>
+            <a:r>
+              <a:t>REQ-20250308-wadiz-approval-execution-record / DA 5</a:t>
             </a:r>
           </a:p>
         </p:txBody>
